--- a/media/resources/files/ButunSandardyJanaOnduktardy_Kemituu_XjanaO.pptx
+++ b/media/resources/files/ButunSandardyJanaOnduktardy_Kemituu_XjanaO.pptx
@@ -8419,7 +8419,7 @@
                 <a:ea typeface="+mn-ea"/>
                 <a:cs typeface="+mn-cs"/>
               </a:rPr>
-              <a:t>Турдуу пикирлер учун ыраазычылык билдиребиз.</a:t>
+              <a:t>Түрдүү пикирлер үчүн ыраазычылык билдиребиз.</a:t>
             </a:r>
           </a:p>
           <a:p>

--- a/media/resources/files/ButunSandardyJanaOnduktardy_Kemituu_XjanaO.pptx
+++ b/media/resources/files/ButunSandardyJanaOnduktardy_Kemituu_XjanaO.pptx
@@ -3945,7 +3945,7 @@
                 <a:ea typeface="+mn-ea"/>
                 <a:cs typeface="Arial" panose="020B0604020202020204" pitchFamily="34" charset="0"/>
               </a:rPr>
-              <a:t>Мугалим үчүн жооп баракчасы жана таратма материалдар камтылган.</a:t>
+              <a:t>Мугалим үчүн жооп барагы жана таратма материалдар бар.</a:t>
             </a:r>
           </a:p>
           <a:p>
@@ -4014,7 +4014,7 @@
                 <a:ea typeface="+mn-ea"/>
                 <a:cs typeface="Arial" panose="020B0604020202020204" pitchFamily="34" charset="0"/>
               </a:rPr>
-              <a:t>Кайсы команда туура жооп бергенине жараша '</a:t>
+              <a:t>Туура жооп берген командага жараша «</a:t>
             </a:r>
             <a:r>
               <a:rPr kumimoji="0" lang="en-GB" sz="2000" b="0" i="0" u="sng" strike="noStrike" kern="1200" cap="none" spc="0" normalizeH="0" baseline="0" noProof="0" dirty="0">
@@ -4031,7 +4031,7 @@
                 <a:ea typeface="+mn-ea"/>
                 <a:cs typeface="Arial" panose="020B0604020202020204" pitchFamily="34" charset="0"/>
               </a:rPr>
-              <a:t>X' </a:t>
+              <a:t>X» </a:t>
             </a:r>
             <a:r>
               <a:rPr kumimoji="0" lang="ru-RU" sz="2000" b="0" i="0" u="sng" strike="noStrike" kern="1200" cap="none" spc="0" normalizeH="0" baseline="0" noProof="0" dirty="0">
@@ -4048,7 +4048,7 @@
                 <a:ea typeface="+mn-ea"/>
                 <a:cs typeface="Arial" panose="020B0604020202020204" pitchFamily="34" charset="0"/>
               </a:rPr>
-              <a:t>же '</a:t>
+              <a:t>же «</a:t>
             </a:r>
             <a:r>
               <a:rPr kumimoji="0" lang="en-GB" sz="2000" b="0" i="0" u="sng" strike="noStrike" kern="1200" cap="none" spc="0" normalizeH="0" baseline="0" noProof="0" dirty="0">
@@ -4065,7 +4065,7 @@
                 <a:ea typeface="+mn-ea"/>
                 <a:cs typeface="Arial" panose="020B0604020202020204" pitchFamily="34" charset="0"/>
               </a:rPr>
-              <a:t>O' </a:t>
+              <a:t>O» </a:t>
             </a:r>
             <a:r>
               <a:rPr kumimoji="0" lang="ru-RU" sz="2000" b="0" i="0" u="sng" strike="noStrike" kern="1200" cap="none" spc="0" normalizeH="0" baseline="0" noProof="0" dirty="0">
@@ -4082,7 +4082,7 @@
                 <a:ea typeface="+mn-ea"/>
                 <a:cs typeface="Arial" panose="020B0604020202020204" pitchFamily="34" charset="0"/>
               </a:rPr>
-              <a:t>баскычын басыңыз/тийип коюңуз</a:t>
+              <a:t>баскычын басыңыз</a:t>
             </a:r>
             <a:r>
               <a:rPr kumimoji="0" lang="en-GB" sz="2000" b="0" i="0" u="none" strike="noStrike" kern="1200" cap="none" spc="0" normalizeH="0" baseline="0" noProof="0" dirty="0">
@@ -4707,7 +4707,7 @@
             <a:pPr algn="ctr"/>
             <a:r>
               <a:rPr lang="en-GB" sz="4800" dirty="0"/>
-              <a:t>4 – 3.4 = </a:t>
+              <a:t>4 – 3,4 = </a:t>
             </a:r>
           </a:p>
         </p:txBody>
@@ -4743,7 +4743,7 @@
             <a:pPr algn="ctr"/>
             <a:r>
               <a:rPr lang="en-GB" sz="4800" dirty="0"/>
-              <a:t>2 – 1.8 = </a:t>
+              <a:t>2 – 1,8 = </a:t>
             </a:r>
           </a:p>
         </p:txBody>
@@ -4779,7 +4779,7 @@
             <a:pPr algn="ctr"/>
             <a:r>
               <a:rPr lang="en-GB" sz="4800" dirty="0"/>
-              <a:t>7 – 2.15 = </a:t>
+              <a:t>7 – 2,15 = </a:t>
             </a:r>
           </a:p>
         </p:txBody>
@@ -4815,7 +4815,7 @@
             <a:pPr algn="ctr"/>
             <a:r>
               <a:rPr lang="en-GB" sz="4800" dirty="0"/>
-              <a:t>6 – 2.28 = </a:t>
+              <a:t>6 – 2,28 = </a:t>
             </a:r>
           </a:p>
         </p:txBody>
@@ -4851,7 +4851,7 @@
             <a:pPr algn="ctr"/>
             <a:r>
               <a:rPr lang="en-GB" sz="4800" dirty="0"/>
-              <a:t>8 – 1.64 = </a:t>
+              <a:t>8 – 1,64 = </a:t>
             </a:r>
           </a:p>
         </p:txBody>
@@ -4887,7 +4887,7 @@
             <a:pPr algn="ctr"/>
             <a:r>
               <a:rPr lang="en-GB" sz="4800" dirty="0"/>
-              <a:t>5 – 3.71 = </a:t>
+              <a:t>5 – 3,71 = </a:t>
             </a:r>
           </a:p>
         </p:txBody>
@@ -4923,7 +4923,7 @@
             <a:pPr algn="ctr"/>
             <a:r>
               <a:rPr lang="en-GB" sz="4800" dirty="0"/>
-              <a:t>7 – 5.1 = </a:t>
+              <a:t>7 – 5,1 = </a:t>
             </a:r>
           </a:p>
         </p:txBody>
@@ -4959,7 +4959,7 @@
             <a:pPr algn="ctr"/>
             <a:r>
               <a:rPr lang="en-GB" sz="4800" dirty="0"/>
-              <a:t>3 – 2.3 = </a:t>
+              <a:t>3 – 2,3 = </a:t>
             </a:r>
           </a:p>
         </p:txBody>
@@ -4995,7 +4995,7 @@
             <a:pPr algn="ctr"/>
             <a:r>
               <a:rPr lang="en-GB" sz="4800" dirty="0"/>
-              <a:t>9 – 4.37 = </a:t>
+              <a:t>9 – 4,37 = </a:t>
             </a:r>
           </a:p>
         </p:txBody>
